--- a/docs/pptx/auc3/ritu-auc3-linsubhr-egfrdisc-death.pptx
+++ b/docs/pptx/auc3/ritu-auc3-linsubhr-egfrdisc-death.pptx
@@ -2443,7 +2443,7 @@
           </p:nvSpPr>
           <p:spPr>
             <a:xfrm>
-              <a:off x="2040316" y="2073503"/>
+              <a:off x="2044638" y="2073503"/>
               <a:ext cx="0" cy="3649639"/>
             </a:xfrm>
             <a:custGeom>
@@ -2486,7 +2486,7 @@
           </p:nvSpPr>
           <p:spPr>
             <a:xfrm>
-              <a:off x="4520982" y="2073503"/>
+              <a:off x="4520586" y="2073503"/>
               <a:ext cx="0" cy="3649639"/>
             </a:xfrm>
             <a:custGeom>
@@ -2529,7 +2529,7 @@
           </p:nvSpPr>
           <p:spPr>
             <a:xfrm>
-              <a:off x="7001648" y="2073503"/>
+              <a:off x="6996534" y="2073503"/>
               <a:ext cx="0" cy="3649639"/>
             </a:xfrm>
             <a:custGeom>
@@ -2787,7 +2787,7 @@
           </p:nvSpPr>
           <p:spPr>
             <a:xfrm>
-              <a:off x="3280649" y="2073503"/>
+              <a:off x="3282612" y="2073503"/>
               <a:ext cx="0" cy="3649639"/>
             </a:xfrm>
             <a:custGeom>
@@ -2830,7 +2830,7 @@
           </p:nvSpPr>
           <p:spPr>
             <a:xfrm>
-              <a:off x="5761315" y="2073503"/>
+              <a:off x="5758560" y="2073503"/>
               <a:ext cx="0" cy="3649639"/>
             </a:xfrm>
             <a:custGeom>
@@ -2873,7 +2873,7 @@
           </p:nvSpPr>
           <p:spPr>
             <a:xfrm>
-              <a:off x="8241981" y="2073503"/>
+              <a:off x="8234508" y="2073503"/>
               <a:ext cx="0" cy="3649639"/>
             </a:xfrm>
             <a:custGeom>
@@ -2959,7 +2959,7 @@
           </p:nvSpPr>
           <p:spPr>
             <a:xfrm>
-              <a:off x="5756448" y="2073503"/>
+              <a:off x="5759271" y="2073503"/>
               <a:ext cx="0" cy="3649639"/>
             </a:xfrm>
             <a:custGeom>
@@ -3002,7 +3002,7 @@
           </p:nvSpPr>
           <p:spPr>
             <a:xfrm>
-              <a:off x="4469314" y="2073503"/>
+              <a:off x="4504692" y="2073503"/>
               <a:ext cx="0" cy="3649639"/>
             </a:xfrm>
             <a:custGeom>
@@ -3045,7 +3045,7 @@
           </p:nvSpPr>
           <p:spPr>
             <a:xfrm>
-              <a:off x="6872676" y="2073503"/>
+              <a:off x="6871070" y="2073503"/>
               <a:ext cx="0" cy="3649639"/>
             </a:xfrm>
             <a:custGeom>
@@ -3318,7 +3318,7 @@
           </p:nvSpPr>
           <p:spPr>
             <a:xfrm>
-              <a:off x="3199861" y="5785772"/>
+              <a:off x="3201825" y="5785772"/>
               <a:ext cx="161574" cy="80101"/>
             </a:xfrm>
             <a:prstGeom prst="rect">
@@ -3364,7 +3364,7 @@
           </p:nvSpPr>
           <p:spPr>
             <a:xfrm>
-              <a:off x="5730225" y="5785772"/>
+              <a:off x="5727471" y="5785772"/>
               <a:ext cx="62179" cy="80101"/>
             </a:xfrm>
             <a:prstGeom prst="rect">
@@ -3410,7 +3410,7 @@
           </p:nvSpPr>
           <p:spPr>
             <a:xfrm>
-              <a:off x="8179802" y="5785772"/>
+              <a:off x="8172329" y="5785772"/>
               <a:ext cx="124358" cy="80101"/>
             </a:xfrm>
             <a:prstGeom prst="rect">
@@ -3581,7 +3581,7 @@
                   <a:latin typeface="Helvetica"/>
                   <a:cs typeface="Helvetica"/>
                 </a:rPr>
-                <a:t>HR per 10 mL/min decline: NA (NA-NA), p_Bonf = NA (n = 6)  |  per IQR decline (Δ = 24.2): NA (NA-NA)  |  IQR: [-13.0, 11.2]</a:t>
+                <a:t>HR per 10 mL/min decline: NA (NA-NA), p_Bonf = NA (n = 6)  |  per IQR decline (Δ = 23.9): NA (NA-NA)  |  IQR: [-12.7, 11.2]</a:t>
               </a:r>
             </a:p>
           </p:txBody>
